--- a/public/videos/repositories/bar-job-alert/bar-job-alert-tech-preview.pptx
+++ b/public/videos/repositories/bar-job-alert/bar-job-alert-tech-preview.pptx
@@ -134,7 +134,7 @@
           <p:cNvPr id="2" name="タイトル 1">
             <a:extLst>
               <a:ext uri="{FF2B5EF4-FFF2-40B4-BE49-F238E27FC236}">
-                <a16:creationId xmlns:a16="http://schemas.microsoft.com/office/drawing/2014/main" id="{EBC51C60-ED06-96D4-FDB6-D3EF26253FA8}"/>
+                <a16:creationId xmlns:a16="http://schemas.microsoft.com/office/drawing/2014/main" id="{324A56B1-19B7-F9A5-C8F1-9F8AC84B629D}"/>
               </a:ext>
             </a:extLst>
           </p:cNvPr>
@@ -171,7 +171,7 @@
           <p:cNvPr id="3" name="字幕 2">
             <a:extLst>
               <a:ext uri="{FF2B5EF4-FFF2-40B4-BE49-F238E27FC236}">
-                <a16:creationId xmlns:a16="http://schemas.microsoft.com/office/drawing/2014/main" id="{5D4FE2BB-5CB9-598E-B91C-22779399F32D}"/>
+                <a16:creationId xmlns:a16="http://schemas.microsoft.com/office/drawing/2014/main" id="{BD076B6D-6C44-7141-3906-93B81D30FFF1}"/>
               </a:ext>
             </a:extLst>
           </p:cNvPr>
@@ -241,7 +241,7 @@
           <p:cNvPr id="4" name="日付プレースホルダー 3">
             <a:extLst>
               <a:ext uri="{FF2B5EF4-FFF2-40B4-BE49-F238E27FC236}">
-                <a16:creationId xmlns:a16="http://schemas.microsoft.com/office/drawing/2014/main" id="{8B4B6A39-367E-69E6-312A-B78DA35C3949}"/>
+                <a16:creationId xmlns:a16="http://schemas.microsoft.com/office/drawing/2014/main" id="{CD1DFB8D-1B70-FBF7-9F43-545E134CFCB2}"/>
               </a:ext>
             </a:extLst>
           </p:cNvPr>
@@ -257,7 +257,7 @@
           <a:bodyPr/>
           <a:lstStyle/>
           <a:p>
-            <a:fld id="{BADA4382-737F-4B92-B5ED-7CBC96371D7D}" type="datetimeFigureOut">
+            <a:fld id="{B221A071-801A-4D29-ABAF-8AA91F96EFE6}" type="datetimeFigureOut">
               <a:rPr kumimoji="1" lang="ja-JP" altLang="en-US" smtClean="0"/>
               <a:t>2026/7/30</a:t>
             </a:fld>
@@ -270,7 +270,7 @@
           <p:cNvPr id="5" name="フッター プレースホルダー 4">
             <a:extLst>
               <a:ext uri="{FF2B5EF4-FFF2-40B4-BE49-F238E27FC236}">
-                <a16:creationId xmlns:a16="http://schemas.microsoft.com/office/drawing/2014/main" id="{470C03BB-8855-0E12-7868-30DA4B231811}"/>
+                <a16:creationId xmlns:a16="http://schemas.microsoft.com/office/drawing/2014/main" id="{694B2A25-CA7F-3765-17E4-2E0F0C904E6D}"/>
               </a:ext>
             </a:extLst>
           </p:cNvPr>
@@ -295,7 +295,7 @@
           <p:cNvPr id="6" name="スライド番号プレースホルダー 5">
             <a:extLst>
               <a:ext uri="{FF2B5EF4-FFF2-40B4-BE49-F238E27FC236}">
-                <a16:creationId xmlns:a16="http://schemas.microsoft.com/office/drawing/2014/main" id="{F6C76015-4421-777C-3F67-BD7C305798E3}"/>
+                <a16:creationId xmlns:a16="http://schemas.microsoft.com/office/drawing/2014/main" id="{5572F80E-5DC3-FDFB-989C-A6027278845B}"/>
               </a:ext>
             </a:extLst>
           </p:cNvPr>
@@ -311,7 +311,7 @@
           <a:bodyPr/>
           <a:lstStyle/>
           <a:p>
-            <a:fld id="{FD6992CC-F6F0-47AE-8E71-3C2C93A5271B}" type="slidenum">
+            <a:fld id="{466FCE93-CB10-4E90-8ECA-5F64916D3EFC}" type="slidenum">
               <a:rPr kumimoji="1" lang="ja-JP" altLang="en-US" smtClean="0"/>
               <a:t>‹#›</a:t>
             </a:fld>
@@ -322,7 +322,7 @@
     </p:spTree>
     <p:extLst>
       <p:ext uri="{BB962C8B-B14F-4D97-AF65-F5344CB8AC3E}">
-        <p14:creationId xmlns:p14="http://schemas.microsoft.com/office/powerpoint/2010/main" val="961484784"/>
+        <p14:creationId xmlns:p14="http://schemas.microsoft.com/office/powerpoint/2010/main" val="3880875664"/>
       </p:ext>
     </p:extLst>
   </p:cSld>
@@ -354,7 +354,7 @@
           <p:cNvPr id="2" name="タイトル 1">
             <a:extLst>
               <a:ext uri="{FF2B5EF4-FFF2-40B4-BE49-F238E27FC236}">
-                <a16:creationId xmlns:a16="http://schemas.microsoft.com/office/drawing/2014/main" id="{98459662-1628-299A-6CC4-1B946581CBC1}"/>
+                <a16:creationId xmlns:a16="http://schemas.microsoft.com/office/drawing/2014/main" id="{F5F7EAFA-8C24-EC7D-B035-1C8471996BC6}"/>
               </a:ext>
             </a:extLst>
           </p:cNvPr>
@@ -382,7 +382,7 @@
           <p:cNvPr id="3" name="縦書きテキスト プレースホルダー 2">
             <a:extLst>
               <a:ext uri="{FF2B5EF4-FFF2-40B4-BE49-F238E27FC236}">
-                <a16:creationId xmlns:a16="http://schemas.microsoft.com/office/drawing/2014/main" id="{867A8B86-E2A0-4F8B-615C-690BA6B47C62}"/>
+                <a16:creationId xmlns:a16="http://schemas.microsoft.com/office/drawing/2014/main" id="{10070728-7FAE-A57B-C80A-5B8362EFD737}"/>
               </a:ext>
             </a:extLst>
           </p:cNvPr>
@@ -471,7 +471,7 @@
           <p:cNvPr id="4" name="日付プレースホルダー 3">
             <a:extLst>
               <a:ext uri="{FF2B5EF4-FFF2-40B4-BE49-F238E27FC236}">
-                <a16:creationId xmlns:a16="http://schemas.microsoft.com/office/drawing/2014/main" id="{8B249FA4-684F-823A-1274-A10D02A7C06D}"/>
+                <a16:creationId xmlns:a16="http://schemas.microsoft.com/office/drawing/2014/main" id="{3AC6AC62-5604-84F6-FF1C-18DFBDF5277E}"/>
               </a:ext>
             </a:extLst>
           </p:cNvPr>
@@ -487,7 +487,7 @@
           <a:bodyPr/>
           <a:lstStyle/>
           <a:p>
-            <a:fld id="{BADA4382-737F-4B92-B5ED-7CBC96371D7D}" type="datetimeFigureOut">
+            <a:fld id="{B221A071-801A-4D29-ABAF-8AA91F96EFE6}" type="datetimeFigureOut">
               <a:rPr kumimoji="1" lang="ja-JP" altLang="en-US" smtClean="0"/>
               <a:t>2026/7/30</a:t>
             </a:fld>
@@ -500,7 +500,7 @@
           <p:cNvPr id="5" name="フッター プレースホルダー 4">
             <a:extLst>
               <a:ext uri="{FF2B5EF4-FFF2-40B4-BE49-F238E27FC236}">
-                <a16:creationId xmlns:a16="http://schemas.microsoft.com/office/drawing/2014/main" id="{8E1AD9AF-B67B-A89D-5162-5497DD9B08BC}"/>
+                <a16:creationId xmlns:a16="http://schemas.microsoft.com/office/drawing/2014/main" id="{758C13F0-CA99-5490-EF50-D8960F28AA61}"/>
               </a:ext>
             </a:extLst>
           </p:cNvPr>
@@ -525,7 +525,7 @@
           <p:cNvPr id="6" name="スライド番号プレースホルダー 5">
             <a:extLst>
               <a:ext uri="{FF2B5EF4-FFF2-40B4-BE49-F238E27FC236}">
-                <a16:creationId xmlns:a16="http://schemas.microsoft.com/office/drawing/2014/main" id="{277A94A1-F598-702A-B97F-BDDC6D9540A9}"/>
+                <a16:creationId xmlns:a16="http://schemas.microsoft.com/office/drawing/2014/main" id="{304BFCF2-12E8-BBF3-9C35-4CC8A6A16323}"/>
               </a:ext>
             </a:extLst>
           </p:cNvPr>
@@ -541,7 +541,7 @@
           <a:bodyPr/>
           <a:lstStyle/>
           <a:p>
-            <a:fld id="{FD6992CC-F6F0-47AE-8E71-3C2C93A5271B}" type="slidenum">
+            <a:fld id="{466FCE93-CB10-4E90-8ECA-5F64916D3EFC}" type="slidenum">
               <a:rPr kumimoji="1" lang="ja-JP" altLang="en-US" smtClean="0"/>
               <a:t>‹#›</a:t>
             </a:fld>
@@ -552,7 +552,7 @@
     </p:spTree>
     <p:extLst>
       <p:ext uri="{BB962C8B-B14F-4D97-AF65-F5344CB8AC3E}">
-        <p14:creationId xmlns:p14="http://schemas.microsoft.com/office/powerpoint/2010/main" val="1626939619"/>
+        <p14:creationId xmlns:p14="http://schemas.microsoft.com/office/powerpoint/2010/main" val="2266625148"/>
       </p:ext>
     </p:extLst>
   </p:cSld>
@@ -584,7 +584,7 @@
           <p:cNvPr id="2" name="縦書きタイトル 1">
             <a:extLst>
               <a:ext uri="{FF2B5EF4-FFF2-40B4-BE49-F238E27FC236}">
-                <a16:creationId xmlns:a16="http://schemas.microsoft.com/office/drawing/2014/main" id="{D0AC6CF9-1863-2BBB-27F5-940F57B9BD47}"/>
+                <a16:creationId xmlns:a16="http://schemas.microsoft.com/office/drawing/2014/main" id="{20F93C28-BFF3-CCC1-8076-A2CE75239785}"/>
               </a:ext>
             </a:extLst>
           </p:cNvPr>
@@ -617,7 +617,7 @@
           <p:cNvPr id="3" name="縦書きテキスト プレースホルダー 2">
             <a:extLst>
               <a:ext uri="{FF2B5EF4-FFF2-40B4-BE49-F238E27FC236}">
-                <a16:creationId xmlns:a16="http://schemas.microsoft.com/office/drawing/2014/main" id="{8E7B529A-CDA8-2647-E0B5-B331A6E3899B}"/>
+                <a16:creationId xmlns:a16="http://schemas.microsoft.com/office/drawing/2014/main" id="{9D233C41-E121-FE9E-7557-021435645C19}"/>
               </a:ext>
             </a:extLst>
           </p:cNvPr>
@@ -711,7 +711,7 @@
           <p:cNvPr id="4" name="日付プレースホルダー 3">
             <a:extLst>
               <a:ext uri="{FF2B5EF4-FFF2-40B4-BE49-F238E27FC236}">
-                <a16:creationId xmlns:a16="http://schemas.microsoft.com/office/drawing/2014/main" id="{77B8F123-87EF-C3DC-777C-39C721343C30}"/>
+                <a16:creationId xmlns:a16="http://schemas.microsoft.com/office/drawing/2014/main" id="{81EE65CB-7CDF-4552-58CC-2F32947F4CA0}"/>
               </a:ext>
             </a:extLst>
           </p:cNvPr>
@@ -727,7 +727,7 @@
           <a:bodyPr/>
           <a:lstStyle/>
           <a:p>
-            <a:fld id="{BADA4382-737F-4B92-B5ED-7CBC96371D7D}" type="datetimeFigureOut">
+            <a:fld id="{B221A071-801A-4D29-ABAF-8AA91F96EFE6}" type="datetimeFigureOut">
               <a:rPr kumimoji="1" lang="ja-JP" altLang="en-US" smtClean="0"/>
               <a:t>2026/7/30</a:t>
             </a:fld>
@@ -740,7 +740,7 @@
           <p:cNvPr id="5" name="フッター プレースホルダー 4">
             <a:extLst>
               <a:ext uri="{FF2B5EF4-FFF2-40B4-BE49-F238E27FC236}">
-                <a16:creationId xmlns:a16="http://schemas.microsoft.com/office/drawing/2014/main" id="{18E10669-4320-E5C5-5A7B-1B6077196FA3}"/>
+                <a16:creationId xmlns:a16="http://schemas.microsoft.com/office/drawing/2014/main" id="{6FF2C52F-4442-22ED-E52C-1A466C23BB39}"/>
               </a:ext>
             </a:extLst>
           </p:cNvPr>
@@ -765,7 +765,7 @@
           <p:cNvPr id="6" name="スライド番号プレースホルダー 5">
             <a:extLst>
               <a:ext uri="{FF2B5EF4-FFF2-40B4-BE49-F238E27FC236}">
-                <a16:creationId xmlns:a16="http://schemas.microsoft.com/office/drawing/2014/main" id="{809E52A8-EA07-ECF8-F166-AC098F44A1A3}"/>
+                <a16:creationId xmlns:a16="http://schemas.microsoft.com/office/drawing/2014/main" id="{64369245-1293-4BA2-60DF-AF56D646F89C}"/>
               </a:ext>
             </a:extLst>
           </p:cNvPr>
@@ -781,7 +781,7 @@
           <a:bodyPr/>
           <a:lstStyle/>
           <a:p>
-            <a:fld id="{FD6992CC-F6F0-47AE-8E71-3C2C93A5271B}" type="slidenum">
+            <a:fld id="{466FCE93-CB10-4E90-8ECA-5F64916D3EFC}" type="slidenum">
               <a:rPr kumimoji="1" lang="ja-JP" altLang="en-US" smtClean="0"/>
               <a:t>‹#›</a:t>
             </a:fld>
@@ -792,7 +792,7 @@
     </p:spTree>
     <p:extLst>
       <p:ext uri="{BB962C8B-B14F-4D97-AF65-F5344CB8AC3E}">
-        <p14:creationId xmlns:p14="http://schemas.microsoft.com/office/powerpoint/2010/main" val="1296159136"/>
+        <p14:creationId xmlns:p14="http://schemas.microsoft.com/office/powerpoint/2010/main" val="467082451"/>
       </p:ext>
     </p:extLst>
   </p:cSld>
@@ -824,7 +824,7 @@
           <p:cNvPr id="2" name="タイトル 1">
             <a:extLst>
               <a:ext uri="{FF2B5EF4-FFF2-40B4-BE49-F238E27FC236}">
-                <a16:creationId xmlns:a16="http://schemas.microsoft.com/office/drawing/2014/main" id="{52615368-4725-23F1-5C20-BA667B6BAD96}"/>
+                <a16:creationId xmlns:a16="http://schemas.microsoft.com/office/drawing/2014/main" id="{53F27BA0-E7A8-D7DA-E63C-0BFBC3EF2264}"/>
               </a:ext>
             </a:extLst>
           </p:cNvPr>
@@ -852,7 +852,7 @@
           <p:cNvPr id="3" name="コンテンツ プレースホルダー 2">
             <a:extLst>
               <a:ext uri="{FF2B5EF4-FFF2-40B4-BE49-F238E27FC236}">
-                <a16:creationId xmlns:a16="http://schemas.microsoft.com/office/drawing/2014/main" id="{E116C610-8EF8-EF44-E32F-09CCB7E1BED4}"/>
+                <a16:creationId xmlns:a16="http://schemas.microsoft.com/office/drawing/2014/main" id="{6AF6FB96-1BDA-1739-E8DA-3FA41BDA03C2}"/>
               </a:ext>
             </a:extLst>
           </p:cNvPr>
@@ -941,7 +941,7 @@
           <p:cNvPr id="4" name="日付プレースホルダー 3">
             <a:extLst>
               <a:ext uri="{FF2B5EF4-FFF2-40B4-BE49-F238E27FC236}">
-                <a16:creationId xmlns:a16="http://schemas.microsoft.com/office/drawing/2014/main" id="{C1222207-3F2D-01BF-24E9-BEB53B154B95}"/>
+                <a16:creationId xmlns:a16="http://schemas.microsoft.com/office/drawing/2014/main" id="{212E56D7-B60F-2DC9-E61E-1644660482C7}"/>
               </a:ext>
             </a:extLst>
           </p:cNvPr>
@@ -957,7 +957,7 @@
           <a:bodyPr/>
           <a:lstStyle/>
           <a:p>
-            <a:fld id="{BADA4382-737F-4B92-B5ED-7CBC96371D7D}" type="datetimeFigureOut">
+            <a:fld id="{B221A071-801A-4D29-ABAF-8AA91F96EFE6}" type="datetimeFigureOut">
               <a:rPr kumimoji="1" lang="ja-JP" altLang="en-US" smtClean="0"/>
               <a:t>2026/7/30</a:t>
             </a:fld>
@@ -970,7 +970,7 @@
           <p:cNvPr id="5" name="フッター プレースホルダー 4">
             <a:extLst>
               <a:ext uri="{FF2B5EF4-FFF2-40B4-BE49-F238E27FC236}">
-                <a16:creationId xmlns:a16="http://schemas.microsoft.com/office/drawing/2014/main" id="{0CC3416F-AF39-F13E-090F-46067AA3F85E}"/>
+                <a16:creationId xmlns:a16="http://schemas.microsoft.com/office/drawing/2014/main" id="{A908F345-9D37-B09A-EBE8-EEF50B2A315C}"/>
               </a:ext>
             </a:extLst>
           </p:cNvPr>
@@ -995,7 +995,7 @@
           <p:cNvPr id="6" name="スライド番号プレースホルダー 5">
             <a:extLst>
               <a:ext uri="{FF2B5EF4-FFF2-40B4-BE49-F238E27FC236}">
-                <a16:creationId xmlns:a16="http://schemas.microsoft.com/office/drawing/2014/main" id="{8C4CF45C-04AA-7F58-FBB3-32C7442104BA}"/>
+                <a16:creationId xmlns:a16="http://schemas.microsoft.com/office/drawing/2014/main" id="{D7643530-0E74-D95A-8FFE-B3885163379F}"/>
               </a:ext>
             </a:extLst>
           </p:cNvPr>
@@ -1011,7 +1011,7 @@
           <a:bodyPr/>
           <a:lstStyle/>
           <a:p>
-            <a:fld id="{FD6992CC-F6F0-47AE-8E71-3C2C93A5271B}" type="slidenum">
+            <a:fld id="{466FCE93-CB10-4E90-8ECA-5F64916D3EFC}" type="slidenum">
               <a:rPr kumimoji="1" lang="ja-JP" altLang="en-US" smtClean="0"/>
               <a:t>‹#›</a:t>
             </a:fld>
@@ -1022,7 +1022,7 @@
     </p:spTree>
     <p:extLst>
       <p:ext uri="{BB962C8B-B14F-4D97-AF65-F5344CB8AC3E}">
-        <p14:creationId xmlns:p14="http://schemas.microsoft.com/office/powerpoint/2010/main" val="1946188660"/>
+        <p14:creationId xmlns:p14="http://schemas.microsoft.com/office/powerpoint/2010/main" val="3192873304"/>
       </p:ext>
     </p:extLst>
   </p:cSld>
@@ -1054,7 +1054,7 @@
           <p:cNvPr id="2" name="タイトル 1">
             <a:extLst>
               <a:ext uri="{FF2B5EF4-FFF2-40B4-BE49-F238E27FC236}">
-                <a16:creationId xmlns:a16="http://schemas.microsoft.com/office/drawing/2014/main" id="{F7FAE65F-FA74-DC5D-0C64-435C18FAD8DE}"/>
+                <a16:creationId xmlns:a16="http://schemas.microsoft.com/office/drawing/2014/main" id="{F6DE8878-E7C7-7CE5-E886-1CAE35EACF5B}"/>
               </a:ext>
             </a:extLst>
           </p:cNvPr>
@@ -1091,7 +1091,7 @@
           <p:cNvPr id="3" name="テキスト プレースホルダー 2">
             <a:extLst>
               <a:ext uri="{FF2B5EF4-FFF2-40B4-BE49-F238E27FC236}">
-                <a16:creationId xmlns:a16="http://schemas.microsoft.com/office/drawing/2014/main" id="{25B0A120-85EA-5294-F625-7D229245F784}"/>
+                <a16:creationId xmlns:a16="http://schemas.microsoft.com/office/drawing/2014/main" id="{05ADC7CF-CEC1-CAA7-B8A4-F76FB42C600D}"/>
               </a:ext>
             </a:extLst>
           </p:cNvPr>
@@ -1216,7 +1216,7 @@
           <p:cNvPr id="4" name="日付プレースホルダー 3">
             <a:extLst>
               <a:ext uri="{FF2B5EF4-FFF2-40B4-BE49-F238E27FC236}">
-                <a16:creationId xmlns:a16="http://schemas.microsoft.com/office/drawing/2014/main" id="{7EC0AB76-3FF1-9FA3-0492-BCFD306C7D73}"/>
+                <a16:creationId xmlns:a16="http://schemas.microsoft.com/office/drawing/2014/main" id="{E9DC256F-B28D-0F51-BA64-F337BCA1D1A7}"/>
               </a:ext>
             </a:extLst>
           </p:cNvPr>
@@ -1232,7 +1232,7 @@
           <a:bodyPr/>
           <a:lstStyle/>
           <a:p>
-            <a:fld id="{BADA4382-737F-4B92-B5ED-7CBC96371D7D}" type="datetimeFigureOut">
+            <a:fld id="{B221A071-801A-4D29-ABAF-8AA91F96EFE6}" type="datetimeFigureOut">
               <a:rPr kumimoji="1" lang="ja-JP" altLang="en-US" smtClean="0"/>
               <a:t>2026/7/30</a:t>
             </a:fld>
@@ -1245,7 +1245,7 @@
           <p:cNvPr id="5" name="フッター プレースホルダー 4">
             <a:extLst>
               <a:ext uri="{FF2B5EF4-FFF2-40B4-BE49-F238E27FC236}">
-                <a16:creationId xmlns:a16="http://schemas.microsoft.com/office/drawing/2014/main" id="{E31C1D7B-2158-E483-15EB-EDBDE4033B71}"/>
+                <a16:creationId xmlns:a16="http://schemas.microsoft.com/office/drawing/2014/main" id="{C1AAD399-65D4-857F-F62C-2F1ECEF9CCC6}"/>
               </a:ext>
             </a:extLst>
           </p:cNvPr>
@@ -1270,7 +1270,7 @@
           <p:cNvPr id="6" name="スライド番号プレースホルダー 5">
             <a:extLst>
               <a:ext uri="{FF2B5EF4-FFF2-40B4-BE49-F238E27FC236}">
-                <a16:creationId xmlns:a16="http://schemas.microsoft.com/office/drawing/2014/main" id="{7FE01274-19F2-1DC3-C141-4C166E0A5C3D}"/>
+                <a16:creationId xmlns:a16="http://schemas.microsoft.com/office/drawing/2014/main" id="{A7A6816E-13D7-F7AD-AC67-C99E7C3C8FA6}"/>
               </a:ext>
             </a:extLst>
           </p:cNvPr>
@@ -1286,7 +1286,7 @@
           <a:bodyPr/>
           <a:lstStyle/>
           <a:p>
-            <a:fld id="{FD6992CC-F6F0-47AE-8E71-3C2C93A5271B}" type="slidenum">
+            <a:fld id="{466FCE93-CB10-4E90-8ECA-5F64916D3EFC}" type="slidenum">
               <a:rPr kumimoji="1" lang="ja-JP" altLang="en-US" smtClean="0"/>
               <a:t>‹#›</a:t>
             </a:fld>
@@ -1297,7 +1297,7 @@
     </p:spTree>
     <p:extLst>
       <p:ext uri="{BB962C8B-B14F-4D97-AF65-F5344CB8AC3E}">
-        <p14:creationId xmlns:p14="http://schemas.microsoft.com/office/powerpoint/2010/main" val="638696262"/>
+        <p14:creationId xmlns:p14="http://schemas.microsoft.com/office/powerpoint/2010/main" val="3215779430"/>
       </p:ext>
     </p:extLst>
   </p:cSld>
@@ -1329,7 +1329,7 @@
           <p:cNvPr id="2" name="タイトル 1">
             <a:extLst>
               <a:ext uri="{FF2B5EF4-FFF2-40B4-BE49-F238E27FC236}">
-                <a16:creationId xmlns:a16="http://schemas.microsoft.com/office/drawing/2014/main" id="{8474623D-50DD-EBA9-59C8-C0B22012918E}"/>
+                <a16:creationId xmlns:a16="http://schemas.microsoft.com/office/drawing/2014/main" id="{BAA5A9B8-B05B-5106-545C-745BB6990B81}"/>
               </a:ext>
             </a:extLst>
           </p:cNvPr>
@@ -1357,7 +1357,7 @@
           <p:cNvPr id="3" name="コンテンツ プレースホルダー 2">
             <a:extLst>
               <a:ext uri="{FF2B5EF4-FFF2-40B4-BE49-F238E27FC236}">
-                <a16:creationId xmlns:a16="http://schemas.microsoft.com/office/drawing/2014/main" id="{09DD7D65-B84A-3DBB-31DC-FAAD6939EFF2}"/>
+                <a16:creationId xmlns:a16="http://schemas.microsoft.com/office/drawing/2014/main" id="{618D6169-AF1E-894F-0C3E-461E9CA0F3F5}"/>
               </a:ext>
             </a:extLst>
           </p:cNvPr>
@@ -1451,7 +1451,7 @@
           <p:cNvPr id="4" name="コンテンツ プレースホルダー 3">
             <a:extLst>
               <a:ext uri="{FF2B5EF4-FFF2-40B4-BE49-F238E27FC236}">
-                <a16:creationId xmlns:a16="http://schemas.microsoft.com/office/drawing/2014/main" id="{71D543BC-393B-2A2F-D1B4-49E1DBCFFF3C}"/>
+                <a16:creationId xmlns:a16="http://schemas.microsoft.com/office/drawing/2014/main" id="{390A0F1D-D777-9E82-4682-0EC921EDA529}"/>
               </a:ext>
             </a:extLst>
           </p:cNvPr>
@@ -1545,7 +1545,7 @@
           <p:cNvPr id="5" name="日付プレースホルダー 4">
             <a:extLst>
               <a:ext uri="{FF2B5EF4-FFF2-40B4-BE49-F238E27FC236}">
-                <a16:creationId xmlns:a16="http://schemas.microsoft.com/office/drawing/2014/main" id="{AD886343-892B-2B99-5EC8-019723AEBD81}"/>
+                <a16:creationId xmlns:a16="http://schemas.microsoft.com/office/drawing/2014/main" id="{1A0C6CE6-3CAD-E9EA-3B13-F253E88471B9}"/>
               </a:ext>
             </a:extLst>
           </p:cNvPr>
@@ -1561,7 +1561,7 @@
           <a:bodyPr/>
           <a:lstStyle/>
           <a:p>
-            <a:fld id="{BADA4382-737F-4B92-B5ED-7CBC96371D7D}" type="datetimeFigureOut">
+            <a:fld id="{B221A071-801A-4D29-ABAF-8AA91F96EFE6}" type="datetimeFigureOut">
               <a:rPr kumimoji="1" lang="ja-JP" altLang="en-US" smtClean="0"/>
               <a:t>2026/7/30</a:t>
             </a:fld>
@@ -1574,7 +1574,7 @@
           <p:cNvPr id="6" name="フッター プレースホルダー 5">
             <a:extLst>
               <a:ext uri="{FF2B5EF4-FFF2-40B4-BE49-F238E27FC236}">
-                <a16:creationId xmlns:a16="http://schemas.microsoft.com/office/drawing/2014/main" id="{41BE61EE-A4E3-A91B-59C3-CFD72A26714C}"/>
+                <a16:creationId xmlns:a16="http://schemas.microsoft.com/office/drawing/2014/main" id="{BCA8A385-6FE9-82F5-E101-31B4712E9833}"/>
               </a:ext>
             </a:extLst>
           </p:cNvPr>
@@ -1599,7 +1599,7 @@
           <p:cNvPr id="7" name="スライド番号プレースホルダー 6">
             <a:extLst>
               <a:ext uri="{FF2B5EF4-FFF2-40B4-BE49-F238E27FC236}">
-                <a16:creationId xmlns:a16="http://schemas.microsoft.com/office/drawing/2014/main" id="{F1F62C34-7307-CF21-8AD0-ECA4F87CD247}"/>
+                <a16:creationId xmlns:a16="http://schemas.microsoft.com/office/drawing/2014/main" id="{290B4451-87C6-DF20-964E-F9BD338383D2}"/>
               </a:ext>
             </a:extLst>
           </p:cNvPr>
@@ -1615,7 +1615,7 @@
           <a:bodyPr/>
           <a:lstStyle/>
           <a:p>
-            <a:fld id="{FD6992CC-F6F0-47AE-8E71-3C2C93A5271B}" type="slidenum">
+            <a:fld id="{466FCE93-CB10-4E90-8ECA-5F64916D3EFC}" type="slidenum">
               <a:rPr kumimoji="1" lang="ja-JP" altLang="en-US" smtClean="0"/>
               <a:t>‹#›</a:t>
             </a:fld>
@@ -1626,7 +1626,7 @@
     </p:spTree>
     <p:extLst>
       <p:ext uri="{BB962C8B-B14F-4D97-AF65-F5344CB8AC3E}">
-        <p14:creationId xmlns:p14="http://schemas.microsoft.com/office/powerpoint/2010/main" val="282571045"/>
+        <p14:creationId xmlns:p14="http://schemas.microsoft.com/office/powerpoint/2010/main" val="2828756915"/>
       </p:ext>
     </p:extLst>
   </p:cSld>
@@ -1658,7 +1658,7 @@
           <p:cNvPr id="2" name="タイトル 1">
             <a:extLst>
               <a:ext uri="{FF2B5EF4-FFF2-40B4-BE49-F238E27FC236}">
-                <a16:creationId xmlns:a16="http://schemas.microsoft.com/office/drawing/2014/main" id="{9134F3E6-DCB5-50F4-3A8F-A17B7F9C666B}"/>
+                <a16:creationId xmlns:a16="http://schemas.microsoft.com/office/drawing/2014/main" id="{07F610BD-6E8F-7F46-47FD-B3E36AD2814F}"/>
               </a:ext>
             </a:extLst>
           </p:cNvPr>
@@ -1691,7 +1691,7 @@
           <p:cNvPr id="3" name="テキスト プレースホルダー 2">
             <a:extLst>
               <a:ext uri="{FF2B5EF4-FFF2-40B4-BE49-F238E27FC236}">
-                <a16:creationId xmlns:a16="http://schemas.microsoft.com/office/drawing/2014/main" id="{426F9F55-A131-2A20-5907-D97997F22F21}"/>
+                <a16:creationId xmlns:a16="http://schemas.microsoft.com/office/drawing/2014/main" id="{A476C883-597F-58F9-B978-29A3340DD4CF}"/>
               </a:ext>
             </a:extLst>
           </p:cNvPr>
@@ -1762,7 +1762,7 @@
           <p:cNvPr id="4" name="コンテンツ プレースホルダー 3">
             <a:extLst>
               <a:ext uri="{FF2B5EF4-FFF2-40B4-BE49-F238E27FC236}">
-                <a16:creationId xmlns:a16="http://schemas.microsoft.com/office/drawing/2014/main" id="{8BF2F200-D4D1-0E6B-B31A-934C06DCB2AD}"/>
+                <a16:creationId xmlns:a16="http://schemas.microsoft.com/office/drawing/2014/main" id="{F0615E5B-07A6-65C1-414D-D56FB6C8118F}"/>
               </a:ext>
             </a:extLst>
           </p:cNvPr>
@@ -1856,7 +1856,7 @@
           <p:cNvPr id="5" name="テキスト プレースホルダー 4">
             <a:extLst>
               <a:ext uri="{FF2B5EF4-FFF2-40B4-BE49-F238E27FC236}">
-                <a16:creationId xmlns:a16="http://schemas.microsoft.com/office/drawing/2014/main" id="{4E699564-2A88-F6C6-D7C3-A52D670A0612}"/>
+                <a16:creationId xmlns:a16="http://schemas.microsoft.com/office/drawing/2014/main" id="{8AA857A8-B22A-5B79-5EEF-6DC53DBFA61F}"/>
               </a:ext>
             </a:extLst>
           </p:cNvPr>
@@ -1927,7 +1927,7 @@
           <p:cNvPr id="6" name="コンテンツ プレースホルダー 5">
             <a:extLst>
               <a:ext uri="{FF2B5EF4-FFF2-40B4-BE49-F238E27FC236}">
-                <a16:creationId xmlns:a16="http://schemas.microsoft.com/office/drawing/2014/main" id="{1DDE8E58-EEAB-5E71-2860-DEDC096D6ECC}"/>
+                <a16:creationId xmlns:a16="http://schemas.microsoft.com/office/drawing/2014/main" id="{2CC7CB76-A247-0846-F5A0-43B58BFD0E7E}"/>
               </a:ext>
             </a:extLst>
           </p:cNvPr>
@@ -2021,7 +2021,7 @@
           <p:cNvPr id="7" name="日付プレースホルダー 6">
             <a:extLst>
               <a:ext uri="{FF2B5EF4-FFF2-40B4-BE49-F238E27FC236}">
-                <a16:creationId xmlns:a16="http://schemas.microsoft.com/office/drawing/2014/main" id="{AA31F7EF-7D45-DDBD-08D9-9FD39D2095A2}"/>
+                <a16:creationId xmlns:a16="http://schemas.microsoft.com/office/drawing/2014/main" id="{C5F88E08-F2E6-BBA0-BD18-E2678F88E776}"/>
               </a:ext>
             </a:extLst>
           </p:cNvPr>
@@ -2037,7 +2037,7 @@
           <a:bodyPr/>
           <a:lstStyle/>
           <a:p>
-            <a:fld id="{BADA4382-737F-4B92-B5ED-7CBC96371D7D}" type="datetimeFigureOut">
+            <a:fld id="{B221A071-801A-4D29-ABAF-8AA91F96EFE6}" type="datetimeFigureOut">
               <a:rPr kumimoji="1" lang="ja-JP" altLang="en-US" smtClean="0"/>
               <a:t>2026/7/30</a:t>
             </a:fld>
@@ -2050,7 +2050,7 @@
           <p:cNvPr id="8" name="フッター プレースホルダー 7">
             <a:extLst>
               <a:ext uri="{FF2B5EF4-FFF2-40B4-BE49-F238E27FC236}">
-                <a16:creationId xmlns:a16="http://schemas.microsoft.com/office/drawing/2014/main" id="{B4A3334C-B608-23CC-DAC6-B975CA7D7BF3}"/>
+                <a16:creationId xmlns:a16="http://schemas.microsoft.com/office/drawing/2014/main" id="{9ED2B6B0-0FB4-31B9-F9DE-859A2282E69E}"/>
               </a:ext>
             </a:extLst>
           </p:cNvPr>
@@ -2075,7 +2075,7 @@
           <p:cNvPr id="9" name="スライド番号プレースホルダー 8">
             <a:extLst>
               <a:ext uri="{FF2B5EF4-FFF2-40B4-BE49-F238E27FC236}">
-                <a16:creationId xmlns:a16="http://schemas.microsoft.com/office/drawing/2014/main" id="{6516C702-FD65-B4E9-6261-6A0D0FB0AC23}"/>
+                <a16:creationId xmlns:a16="http://schemas.microsoft.com/office/drawing/2014/main" id="{589A27AC-5A28-63AE-ABF7-97874FE62CD7}"/>
               </a:ext>
             </a:extLst>
           </p:cNvPr>
@@ -2091,7 +2091,7 @@
           <a:bodyPr/>
           <a:lstStyle/>
           <a:p>
-            <a:fld id="{FD6992CC-F6F0-47AE-8E71-3C2C93A5271B}" type="slidenum">
+            <a:fld id="{466FCE93-CB10-4E90-8ECA-5F64916D3EFC}" type="slidenum">
               <a:rPr kumimoji="1" lang="ja-JP" altLang="en-US" smtClean="0"/>
               <a:t>‹#›</a:t>
             </a:fld>
@@ -2102,7 +2102,7 @@
     </p:spTree>
     <p:extLst>
       <p:ext uri="{BB962C8B-B14F-4D97-AF65-F5344CB8AC3E}">
-        <p14:creationId xmlns:p14="http://schemas.microsoft.com/office/powerpoint/2010/main" val="3667500355"/>
+        <p14:creationId xmlns:p14="http://schemas.microsoft.com/office/powerpoint/2010/main" val="559588183"/>
       </p:ext>
     </p:extLst>
   </p:cSld>
@@ -2134,7 +2134,7 @@
           <p:cNvPr id="2" name="タイトル 1">
             <a:extLst>
               <a:ext uri="{FF2B5EF4-FFF2-40B4-BE49-F238E27FC236}">
-                <a16:creationId xmlns:a16="http://schemas.microsoft.com/office/drawing/2014/main" id="{5E1EBEE7-D1DE-724C-6508-8F72AC55E071}"/>
+                <a16:creationId xmlns:a16="http://schemas.microsoft.com/office/drawing/2014/main" id="{9CB67B06-132E-9320-1FBA-6714DD3B23EC}"/>
               </a:ext>
             </a:extLst>
           </p:cNvPr>
@@ -2162,7 +2162,7 @@
           <p:cNvPr id="3" name="日付プレースホルダー 2">
             <a:extLst>
               <a:ext uri="{FF2B5EF4-FFF2-40B4-BE49-F238E27FC236}">
-                <a16:creationId xmlns:a16="http://schemas.microsoft.com/office/drawing/2014/main" id="{0FB4E803-19B0-6DC3-6F53-C16D07B21D0E}"/>
+                <a16:creationId xmlns:a16="http://schemas.microsoft.com/office/drawing/2014/main" id="{764CB354-B2EA-4D48-1245-7BC16C063FA5}"/>
               </a:ext>
             </a:extLst>
           </p:cNvPr>
@@ -2178,7 +2178,7 @@
           <a:bodyPr/>
           <a:lstStyle/>
           <a:p>
-            <a:fld id="{BADA4382-737F-4B92-B5ED-7CBC96371D7D}" type="datetimeFigureOut">
+            <a:fld id="{B221A071-801A-4D29-ABAF-8AA91F96EFE6}" type="datetimeFigureOut">
               <a:rPr kumimoji="1" lang="ja-JP" altLang="en-US" smtClean="0"/>
               <a:t>2026/7/30</a:t>
             </a:fld>
@@ -2191,7 +2191,7 @@
           <p:cNvPr id="4" name="フッター プレースホルダー 3">
             <a:extLst>
               <a:ext uri="{FF2B5EF4-FFF2-40B4-BE49-F238E27FC236}">
-                <a16:creationId xmlns:a16="http://schemas.microsoft.com/office/drawing/2014/main" id="{0CA4945B-DE15-0AFF-2CD2-D43FFD14C525}"/>
+                <a16:creationId xmlns:a16="http://schemas.microsoft.com/office/drawing/2014/main" id="{87117F80-0505-CACC-444E-F5DBAF33E028}"/>
               </a:ext>
             </a:extLst>
           </p:cNvPr>
@@ -2216,7 +2216,7 @@
           <p:cNvPr id="5" name="スライド番号プレースホルダー 4">
             <a:extLst>
               <a:ext uri="{FF2B5EF4-FFF2-40B4-BE49-F238E27FC236}">
-                <a16:creationId xmlns:a16="http://schemas.microsoft.com/office/drawing/2014/main" id="{623A8126-724B-8453-2A27-AEE65287B4A3}"/>
+                <a16:creationId xmlns:a16="http://schemas.microsoft.com/office/drawing/2014/main" id="{59865D04-DAB3-4113-5A03-ACE0B09CC32B}"/>
               </a:ext>
             </a:extLst>
           </p:cNvPr>
@@ -2232,7 +2232,7 @@
           <a:bodyPr/>
           <a:lstStyle/>
           <a:p>
-            <a:fld id="{FD6992CC-F6F0-47AE-8E71-3C2C93A5271B}" type="slidenum">
+            <a:fld id="{466FCE93-CB10-4E90-8ECA-5F64916D3EFC}" type="slidenum">
               <a:rPr kumimoji="1" lang="ja-JP" altLang="en-US" smtClean="0"/>
               <a:t>‹#›</a:t>
             </a:fld>
@@ -2243,7 +2243,7 @@
     </p:spTree>
     <p:extLst>
       <p:ext uri="{BB962C8B-B14F-4D97-AF65-F5344CB8AC3E}">
-        <p14:creationId xmlns:p14="http://schemas.microsoft.com/office/powerpoint/2010/main" val="4172792031"/>
+        <p14:creationId xmlns:p14="http://schemas.microsoft.com/office/powerpoint/2010/main" val="3464682941"/>
       </p:ext>
     </p:extLst>
   </p:cSld>
@@ -2275,7 +2275,7 @@
           <p:cNvPr id="2" name="日付プレースホルダー 1">
             <a:extLst>
               <a:ext uri="{FF2B5EF4-FFF2-40B4-BE49-F238E27FC236}">
-                <a16:creationId xmlns:a16="http://schemas.microsoft.com/office/drawing/2014/main" id="{53447DF7-11E2-AF8D-006D-BF53C581B9B0}"/>
+                <a16:creationId xmlns:a16="http://schemas.microsoft.com/office/drawing/2014/main" id="{7ACCC12E-31DB-6FAE-511A-80DD29420BC6}"/>
               </a:ext>
             </a:extLst>
           </p:cNvPr>
@@ -2291,7 +2291,7 @@
           <a:bodyPr/>
           <a:lstStyle/>
           <a:p>
-            <a:fld id="{BADA4382-737F-4B92-B5ED-7CBC96371D7D}" type="datetimeFigureOut">
+            <a:fld id="{B221A071-801A-4D29-ABAF-8AA91F96EFE6}" type="datetimeFigureOut">
               <a:rPr kumimoji="1" lang="ja-JP" altLang="en-US" smtClean="0"/>
               <a:t>2026/7/30</a:t>
             </a:fld>
@@ -2304,7 +2304,7 @@
           <p:cNvPr id="3" name="フッター プレースホルダー 2">
             <a:extLst>
               <a:ext uri="{FF2B5EF4-FFF2-40B4-BE49-F238E27FC236}">
-                <a16:creationId xmlns:a16="http://schemas.microsoft.com/office/drawing/2014/main" id="{D129DEF9-14EB-7C1B-D8BE-1331C8CFC6E4}"/>
+                <a16:creationId xmlns:a16="http://schemas.microsoft.com/office/drawing/2014/main" id="{AA193EB5-0453-34B0-C3BD-4337E45A9E75}"/>
               </a:ext>
             </a:extLst>
           </p:cNvPr>
@@ -2329,7 +2329,7 @@
           <p:cNvPr id="4" name="スライド番号プレースホルダー 3">
             <a:extLst>
               <a:ext uri="{FF2B5EF4-FFF2-40B4-BE49-F238E27FC236}">
-                <a16:creationId xmlns:a16="http://schemas.microsoft.com/office/drawing/2014/main" id="{0C2BFCEB-0887-06D0-E68B-9A2CD12B001F}"/>
+                <a16:creationId xmlns:a16="http://schemas.microsoft.com/office/drawing/2014/main" id="{8755FDA5-C4EE-C5AA-892E-B261A9D18B70}"/>
               </a:ext>
             </a:extLst>
           </p:cNvPr>
@@ -2345,7 +2345,7 @@
           <a:bodyPr/>
           <a:lstStyle/>
           <a:p>
-            <a:fld id="{FD6992CC-F6F0-47AE-8E71-3C2C93A5271B}" type="slidenum">
+            <a:fld id="{466FCE93-CB10-4E90-8ECA-5F64916D3EFC}" type="slidenum">
               <a:rPr kumimoji="1" lang="ja-JP" altLang="en-US" smtClean="0"/>
               <a:t>‹#›</a:t>
             </a:fld>
@@ -2356,7 +2356,7 @@
     </p:spTree>
     <p:extLst>
       <p:ext uri="{BB962C8B-B14F-4D97-AF65-F5344CB8AC3E}">
-        <p14:creationId xmlns:p14="http://schemas.microsoft.com/office/powerpoint/2010/main" val="230496584"/>
+        <p14:creationId xmlns:p14="http://schemas.microsoft.com/office/powerpoint/2010/main" val="3894756150"/>
       </p:ext>
     </p:extLst>
   </p:cSld>
@@ -2388,7 +2388,7 @@
           <p:cNvPr id="2" name="タイトル 1">
             <a:extLst>
               <a:ext uri="{FF2B5EF4-FFF2-40B4-BE49-F238E27FC236}">
-                <a16:creationId xmlns:a16="http://schemas.microsoft.com/office/drawing/2014/main" id="{40F7B1F1-270C-785C-E25C-414ED1B3040A}"/>
+                <a16:creationId xmlns:a16="http://schemas.microsoft.com/office/drawing/2014/main" id="{6FC3A409-C01B-D740-CDA2-ECE9D1779FFC}"/>
               </a:ext>
             </a:extLst>
           </p:cNvPr>
@@ -2425,7 +2425,7 @@
           <p:cNvPr id="3" name="コンテンツ プレースホルダー 2">
             <a:extLst>
               <a:ext uri="{FF2B5EF4-FFF2-40B4-BE49-F238E27FC236}">
-                <a16:creationId xmlns:a16="http://schemas.microsoft.com/office/drawing/2014/main" id="{95FE7F14-55EC-CBF1-24A5-6350E05DFE96}"/>
+                <a16:creationId xmlns:a16="http://schemas.microsoft.com/office/drawing/2014/main" id="{B9E780CD-CEAC-47D8-6A40-AF4E9C46172D}"/>
               </a:ext>
             </a:extLst>
           </p:cNvPr>
@@ -2547,7 +2547,7 @@
           <p:cNvPr id="4" name="テキスト プレースホルダー 3">
             <a:extLst>
               <a:ext uri="{FF2B5EF4-FFF2-40B4-BE49-F238E27FC236}">
-                <a16:creationId xmlns:a16="http://schemas.microsoft.com/office/drawing/2014/main" id="{8253898D-5904-07DF-2877-833B4C040395}"/>
+                <a16:creationId xmlns:a16="http://schemas.microsoft.com/office/drawing/2014/main" id="{453429B8-1712-6BFA-CE7D-02A9ECB62233}"/>
               </a:ext>
             </a:extLst>
           </p:cNvPr>
@@ -2618,7 +2618,7 @@
           <p:cNvPr id="5" name="日付プレースホルダー 4">
             <a:extLst>
               <a:ext uri="{FF2B5EF4-FFF2-40B4-BE49-F238E27FC236}">
-                <a16:creationId xmlns:a16="http://schemas.microsoft.com/office/drawing/2014/main" id="{BF805CF8-B06D-827D-B135-95B5D60CD030}"/>
+                <a16:creationId xmlns:a16="http://schemas.microsoft.com/office/drawing/2014/main" id="{ED6E661A-19A4-663C-B699-A7569815B92B}"/>
               </a:ext>
             </a:extLst>
           </p:cNvPr>
@@ -2634,7 +2634,7 @@
           <a:bodyPr/>
           <a:lstStyle/>
           <a:p>
-            <a:fld id="{BADA4382-737F-4B92-B5ED-7CBC96371D7D}" type="datetimeFigureOut">
+            <a:fld id="{B221A071-801A-4D29-ABAF-8AA91F96EFE6}" type="datetimeFigureOut">
               <a:rPr kumimoji="1" lang="ja-JP" altLang="en-US" smtClean="0"/>
               <a:t>2026/7/30</a:t>
             </a:fld>
@@ -2647,7 +2647,7 @@
           <p:cNvPr id="6" name="フッター プレースホルダー 5">
             <a:extLst>
               <a:ext uri="{FF2B5EF4-FFF2-40B4-BE49-F238E27FC236}">
-                <a16:creationId xmlns:a16="http://schemas.microsoft.com/office/drawing/2014/main" id="{F683C711-0FE9-87B1-E836-D2DC1981D590}"/>
+                <a16:creationId xmlns:a16="http://schemas.microsoft.com/office/drawing/2014/main" id="{861B3FB3-3B5E-34C2-6330-9AE0DBE06E2C}"/>
               </a:ext>
             </a:extLst>
           </p:cNvPr>
@@ -2672,7 +2672,7 @@
           <p:cNvPr id="7" name="スライド番号プレースホルダー 6">
             <a:extLst>
               <a:ext uri="{FF2B5EF4-FFF2-40B4-BE49-F238E27FC236}">
-                <a16:creationId xmlns:a16="http://schemas.microsoft.com/office/drawing/2014/main" id="{92F94F89-AC66-C667-20AF-AA8EA152839D}"/>
+                <a16:creationId xmlns:a16="http://schemas.microsoft.com/office/drawing/2014/main" id="{BEE0D9F6-1DAD-7CB0-B91F-7E9DCBE8F40D}"/>
               </a:ext>
             </a:extLst>
           </p:cNvPr>
@@ -2688,7 +2688,7 @@
           <a:bodyPr/>
           <a:lstStyle/>
           <a:p>
-            <a:fld id="{FD6992CC-F6F0-47AE-8E71-3C2C93A5271B}" type="slidenum">
+            <a:fld id="{466FCE93-CB10-4E90-8ECA-5F64916D3EFC}" type="slidenum">
               <a:rPr kumimoji="1" lang="ja-JP" altLang="en-US" smtClean="0"/>
               <a:t>‹#›</a:t>
             </a:fld>
@@ -2699,7 +2699,7 @@
     </p:spTree>
     <p:extLst>
       <p:ext uri="{BB962C8B-B14F-4D97-AF65-F5344CB8AC3E}">
-        <p14:creationId xmlns:p14="http://schemas.microsoft.com/office/powerpoint/2010/main" val="211300324"/>
+        <p14:creationId xmlns:p14="http://schemas.microsoft.com/office/powerpoint/2010/main" val="2984758888"/>
       </p:ext>
     </p:extLst>
   </p:cSld>
@@ -2731,7 +2731,7 @@
           <p:cNvPr id="2" name="タイトル 1">
             <a:extLst>
               <a:ext uri="{FF2B5EF4-FFF2-40B4-BE49-F238E27FC236}">
-                <a16:creationId xmlns:a16="http://schemas.microsoft.com/office/drawing/2014/main" id="{4E4569CD-F081-E5A5-A15F-D6CD18D03EB8}"/>
+                <a16:creationId xmlns:a16="http://schemas.microsoft.com/office/drawing/2014/main" id="{3A3EC098-4E52-9029-99FA-32074D5E633B}"/>
               </a:ext>
             </a:extLst>
           </p:cNvPr>
@@ -2768,7 +2768,7 @@
           <p:cNvPr id="3" name="図プレースホルダー 2">
             <a:extLst>
               <a:ext uri="{FF2B5EF4-FFF2-40B4-BE49-F238E27FC236}">
-                <a16:creationId xmlns:a16="http://schemas.microsoft.com/office/drawing/2014/main" id="{D4F797C1-B4D6-A9B7-93DA-81C065EA623E}"/>
+                <a16:creationId xmlns:a16="http://schemas.microsoft.com/office/drawing/2014/main" id="{A26D503E-6402-1228-6354-55F1BDFCF3A2}"/>
               </a:ext>
             </a:extLst>
           </p:cNvPr>
@@ -2835,7 +2835,7 @@
           <p:cNvPr id="4" name="テキスト プレースホルダー 3">
             <a:extLst>
               <a:ext uri="{FF2B5EF4-FFF2-40B4-BE49-F238E27FC236}">
-                <a16:creationId xmlns:a16="http://schemas.microsoft.com/office/drawing/2014/main" id="{4BD5842A-CD70-B740-8031-2F3A1C0B82F8}"/>
+                <a16:creationId xmlns:a16="http://schemas.microsoft.com/office/drawing/2014/main" id="{833FB02D-414F-F06F-780B-43623BC63F73}"/>
               </a:ext>
             </a:extLst>
           </p:cNvPr>
@@ -2906,7 +2906,7 @@
           <p:cNvPr id="5" name="日付プレースホルダー 4">
             <a:extLst>
               <a:ext uri="{FF2B5EF4-FFF2-40B4-BE49-F238E27FC236}">
-                <a16:creationId xmlns:a16="http://schemas.microsoft.com/office/drawing/2014/main" id="{E9D1A244-7558-A2AF-842A-8A1E5B31F492}"/>
+                <a16:creationId xmlns:a16="http://schemas.microsoft.com/office/drawing/2014/main" id="{B7BDE09A-7281-E9D2-0714-5F93ED9FF265}"/>
               </a:ext>
             </a:extLst>
           </p:cNvPr>
@@ -2922,7 +2922,7 @@
           <a:bodyPr/>
           <a:lstStyle/>
           <a:p>
-            <a:fld id="{BADA4382-737F-4B92-B5ED-7CBC96371D7D}" type="datetimeFigureOut">
+            <a:fld id="{B221A071-801A-4D29-ABAF-8AA91F96EFE6}" type="datetimeFigureOut">
               <a:rPr kumimoji="1" lang="ja-JP" altLang="en-US" smtClean="0"/>
               <a:t>2026/7/30</a:t>
             </a:fld>
@@ -2935,7 +2935,7 @@
           <p:cNvPr id="6" name="フッター プレースホルダー 5">
             <a:extLst>
               <a:ext uri="{FF2B5EF4-FFF2-40B4-BE49-F238E27FC236}">
-                <a16:creationId xmlns:a16="http://schemas.microsoft.com/office/drawing/2014/main" id="{0B24DD33-2C77-214D-0B47-6AEFB658970A}"/>
+                <a16:creationId xmlns:a16="http://schemas.microsoft.com/office/drawing/2014/main" id="{30332B0A-E2C9-298E-DC17-F10A58D4ED6C}"/>
               </a:ext>
             </a:extLst>
           </p:cNvPr>
@@ -2960,7 +2960,7 @@
           <p:cNvPr id="7" name="スライド番号プレースホルダー 6">
             <a:extLst>
               <a:ext uri="{FF2B5EF4-FFF2-40B4-BE49-F238E27FC236}">
-                <a16:creationId xmlns:a16="http://schemas.microsoft.com/office/drawing/2014/main" id="{8CD62493-39FE-FDE5-9E4C-F7446068B4A5}"/>
+                <a16:creationId xmlns:a16="http://schemas.microsoft.com/office/drawing/2014/main" id="{9F11664B-051A-608B-3A69-8E8D6425029A}"/>
               </a:ext>
             </a:extLst>
           </p:cNvPr>
@@ -2976,7 +2976,7 @@
           <a:bodyPr/>
           <a:lstStyle/>
           <a:p>
-            <a:fld id="{FD6992CC-F6F0-47AE-8E71-3C2C93A5271B}" type="slidenum">
+            <a:fld id="{466FCE93-CB10-4E90-8ECA-5F64916D3EFC}" type="slidenum">
               <a:rPr kumimoji="1" lang="ja-JP" altLang="en-US" smtClean="0"/>
               <a:t>‹#›</a:t>
             </a:fld>
@@ -2987,7 +2987,7 @@
     </p:spTree>
     <p:extLst>
       <p:ext uri="{BB962C8B-B14F-4D97-AF65-F5344CB8AC3E}">
-        <p14:creationId xmlns:p14="http://schemas.microsoft.com/office/powerpoint/2010/main" val="3124887887"/>
+        <p14:creationId xmlns:p14="http://schemas.microsoft.com/office/powerpoint/2010/main" val="896583122"/>
       </p:ext>
     </p:extLst>
   </p:cSld>
@@ -3024,7 +3024,7 @@
           <p:cNvPr id="2" name="タイトル プレースホルダー 1">
             <a:extLst>
               <a:ext uri="{FF2B5EF4-FFF2-40B4-BE49-F238E27FC236}">
-                <a16:creationId xmlns:a16="http://schemas.microsoft.com/office/drawing/2014/main" id="{ED71BF78-F980-9705-1644-A9DC38C231B3}"/>
+                <a16:creationId xmlns:a16="http://schemas.microsoft.com/office/drawing/2014/main" id="{C247E615-7B51-F84B-609E-2C03D3B7BAEC}"/>
               </a:ext>
             </a:extLst>
           </p:cNvPr>
@@ -3062,7 +3062,7 @@
           <p:cNvPr id="3" name="テキスト プレースホルダー 2">
             <a:extLst>
               <a:ext uri="{FF2B5EF4-FFF2-40B4-BE49-F238E27FC236}">
-                <a16:creationId xmlns:a16="http://schemas.microsoft.com/office/drawing/2014/main" id="{4A64752B-BC4A-F0E7-2731-200B4F59BDDB}"/>
+                <a16:creationId xmlns:a16="http://schemas.microsoft.com/office/drawing/2014/main" id="{101EA655-0A10-E045-119B-84F3530204DC}"/>
               </a:ext>
             </a:extLst>
           </p:cNvPr>
@@ -3161,7 +3161,7 @@
           <p:cNvPr id="4" name="日付プレースホルダー 3">
             <a:extLst>
               <a:ext uri="{FF2B5EF4-FFF2-40B4-BE49-F238E27FC236}">
-                <a16:creationId xmlns:a16="http://schemas.microsoft.com/office/drawing/2014/main" id="{D5B5C657-0B7B-8C8D-A431-470164A7D6C3}"/>
+                <a16:creationId xmlns:a16="http://schemas.microsoft.com/office/drawing/2014/main" id="{92E1CD47-494A-7688-3CB7-E3CDDD57D164}"/>
               </a:ext>
             </a:extLst>
           </p:cNvPr>
@@ -3195,7 +3195,7 @@
             </a:lvl1pPr>
           </a:lstStyle>
           <a:p>
-            <a:fld id="{BADA4382-737F-4B92-B5ED-7CBC96371D7D}" type="datetimeFigureOut">
+            <a:fld id="{B221A071-801A-4D29-ABAF-8AA91F96EFE6}" type="datetimeFigureOut">
               <a:rPr kumimoji="1" lang="ja-JP" altLang="en-US" smtClean="0"/>
               <a:t>2026/7/30</a:t>
             </a:fld>
@@ -3208,7 +3208,7 @@
           <p:cNvPr id="5" name="フッター プレースホルダー 4">
             <a:extLst>
               <a:ext uri="{FF2B5EF4-FFF2-40B4-BE49-F238E27FC236}">
-                <a16:creationId xmlns:a16="http://schemas.microsoft.com/office/drawing/2014/main" id="{A02503F7-3416-D1E9-F7EF-AC58BB571EC1}"/>
+                <a16:creationId xmlns:a16="http://schemas.microsoft.com/office/drawing/2014/main" id="{211C1B02-F649-9DB3-5158-1CB5B4C5A23A}"/>
               </a:ext>
             </a:extLst>
           </p:cNvPr>
@@ -3251,7 +3251,7 @@
           <p:cNvPr id="6" name="スライド番号プレースホルダー 5">
             <a:extLst>
               <a:ext uri="{FF2B5EF4-FFF2-40B4-BE49-F238E27FC236}">
-                <a16:creationId xmlns:a16="http://schemas.microsoft.com/office/drawing/2014/main" id="{1D0D8E5C-EE83-56A5-471E-E7D1FD96DC4F}"/>
+                <a16:creationId xmlns:a16="http://schemas.microsoft.com/office/drawing/2014/main" id="{2F53845D-37DF-7095-366C-3ABB2F2A8AF5}"/>
               </a:ext>
             </a:extLst>
           </p:cNvPr>
@@ -3285,7 +3285,7 @@
             </a:lvl1pPr>
           </a:lstStyle>
           <a:p>
-            <a:fld id="{FD6992CC-F6F0-47AE-8E71-3C2C93A5271B}" type="slidenum">
+            <a:fld id="{466FCE93-CB10-4E90-8ECA-5F64916D3EFC}" type="slidenum">
               <a:rPr kumimoji="1" lang="ja-JP" altLang="en-US" smtClean="0"/>
               <a:t>‹#›</a:t>
             </a:fld>
@@ -3296,7 +3296,7 @@
     </p:spTree>
     <p:extLst>
       <p:ext uri="{BB962C8B-B14F-4D97-AF65-F5344CB8AC3E}">
-        <p14:creationId xmlns:p14="http://schemas.microsoft.com/office/powerpoint/2010/main" val="2846547630"/>
+        <p14:creationId xmlns:p14="http://schemas.microsoft.com/office/powerpoint/2010/main" val="4231603978"/>
       </p:ext>
     </p:extLst>
   </p:cSld>
@@ -3619,7 +3619,7 @@
           <p:cNvPr id="2" name="テキスト ボックス 1">
             <a:extLst>
               <a:ext uri="{FF2B5EF4-FFF2-40B4-BE49-F238E27FC236}">
-                <a16:creationId xmlns:a16="http://schemas.microsoft.com/office/drawing/2014/main" id="{F4865272-C8A1-F4D2-AE9E-98F28281952D}"/>
+                <a16:creationId xmlns:a16="http://schemas.microsoft.com/office/drawing/2014/main" id="{1C17DE94-E79A-9895-539A-49FDDC84C241}"/>
               </a:ext>
             </a:extLst>
           </p:cNvPr>
@@ -3665,7 +3665,7 @@
           <p:cNvPr id="3" name="テキスト ボックス 2">
             <a:extLst>
               <a:ext uri="{FF2B5EF4-FFF2-40B4-BE49-F238E27FC236}">
-                <a16:creationId xmlns:a16="http://schemas.microsoft.com/office/drawing/2014/main" id="{A5326292-DE68-FEFB-FFA5-D4B5BBF4EC5B}"/>
+                <a16:creationId xmlns:a16="http://schemas.microsoft.com/office/drawing/2014/main" id="{C2FDC77B-19EF-F484-1EDE-127CDD79B394}"/>
               </a:ext>
             </a:extLst>
           </p:cNvPr>
@@ -3714,7 +3714,7 @@
           <p:cNvPr id="4" name="テキスト ボックス 3">
             <a:extLst>
               <a:ext uri="{FF2B5EF4-FFF2-40B4-BE49-F238E27FC236}">
-                <a16:creationId xmlns:a16="http://schemas.microsoft.com/office/drawing/2014/main" id="{DE652C56-1D22-E55C-D3F4-44E1FEE87AD2}"/>
+                <a16:creationId xmlns:a16="http://schemas.microsoft.com/office/drawing/2014/main" id="{29533185-90F0-70F1-56C2-A1CBE893C287}"/>
               </a:ext>
             </a:extLst>
           </p:cNvPr>
@@ -3754,7 +3754,7 @@
           <p:cNvPr id="5" name="テキスト ボックス 4">
             <a:extLst>
               <a:ext uri="{FF2B5EF4-FFF2-40B4-BE49-F238E27FC236}">
-                <a16:creationId xmlns:a16="http://schemas.microsoft.com/office/drawing/2014/main" id="{19D49C14-0E56-45B1-EA43-2E5468A02854}"/>
+                <a16:creationId xmlns:a16="http://schemas.microsoft.com/office/drawing/2014/main" id="{91D1FA71-79E5-B15F-4AAE-38DB60AC69DF}"/>
               </a:ext>
             </a:extLst>
           </p:cNvPr>
@@ -3801,7 +3801,7 @@
             <a:hlinkClick r:id="" action="ppaction://media"/>
             <a:extLst>
               <a:ext uri="{FF2B5EF4-FFF2-40B4-BE49-F238E27FC236}">
-                <a16:creationId xmlns:a16="http://schemas.microsoft.com/office/drawing/2014/main" id="{94C51DCD-A3D7-53FA-16E2-A629933D51E5}"/>
+                <a16:creationId xmlns:a16="http://schemas.microsoft.com/office/drawing/2014/main" id="{A0EFE2C1-A658-9DF6-785B-DFBE1A535175}"/>
               </a:ext>
             </a:extLst>
           </p:cNvPr>
@@ -3836,7 +3836,7 @@
     </p:spTree>
     <p:extLst>
       <p:ext uri="{BB962C8B-B14F-4D97-AF65-F5344CB8AC3E}">
-        <p14:creationId xmlns:p14="http://schemas.microsoft.com/office/powerpoint/2010/main" val="3942293702"/>
+        <p14:creationId xmlns:p14="http://schemas.microsoft.com/office/powerpoint/2010/main" val="116655315"/>
       </p:ext>
     </p:extLst>
   </p:cSld>
@@ -3960,7 +3960,7 @@
           <p:cNvPr id="2" name="テキスト ボックス 1">
             <a:extLst>
               <a:ext uri="{FF2B5EF4-FFF2-40B4-BE49-F238E27FC236}">
-                <a16:creationId xmlns:a16="http://schemas.microsoft.com/office/drawing/2014/main" id="{5FCCF230-EFE4-1FF8-6FC1-883059E67055}"/>
+                <a16:creationId xmlns:a16="http://schemas.microsoft.com/office/drawing/2014/main" id="{17FEA866-9751-8330-9EB2-70A87655657D}"/>
               </a:ext>
             </a:extLst>
           </p:cNvPr>
@@ -4006,7 +4006,7 @@
           <p:cNvPr id="3" name="テキスト ボックス 2">
             <a:extLst>
               <a:ext uri="{FF2B5EF4-FFF2-40B4-BE49-F238E27FC236}">
-                <a16:creationId xmlns:a16="http://schemas.microsoft.com/office/drawing/2014/main" id="{B95F8CA4-4B29-C8E2-E031-D7439560D43E}"/>
+                <a16:creationId xmlns:a16="http://schemas.microsoft.com/office/drawing/2014/main" id="{3165F48D-A80A-4F30-2925-8CFFAD908F4A}"/>
               </a:ext>
             </a:extLst>
           </p:cNvPr>
@@ -4046,7 +4046,7 @@
           <p:cNvPr id="4" name="テキスト ボックス 3">
             <a:extLst>
               <a:ext uri="{FF2B5EF4-FFF2-40B4-BE49-F238E27FC236}">
-                <a16:creationId xmlns:a16="http://schemas.microsoft.com/office/drawing/2014/main" id="{23C377B0-AF14-C67D-9D0D-10A937FC4250}"/>
+                <a16:creationId xmlns:a16="http://schemas.microsoft.com/office/drawing/2014/main" id="{7ADC1757-F65D-1509-ADB4-4B92F289CBA0}"/>
               </a:ext>
             </a:extLst>
           </p:cNvPr>
@@ -4110,7 +4110,7 @@
           <p:cNvPr id="5" name="テキスト ボックス 4">
             <a:extLst>
               <a:ext uri="{FF2B5EF4-FFF2-40B4-BE49-F238E27FC236}">
-                <a16:creationId xmlns:a16="http://schemas.microsoft.com/office/drawing/2014/main" id="{B2E47717-50CA-9D76-328D-D54FFC2FAA11}"/>
+                <a16:creationId xmlns:a16="http://schemas.microsoft.com/office/drawing/2014/main" id="{06546104-7C78-C6AA-CCEC-2484B47416A6}"/>
               </a:ext>
             </a:extLst>
           </p:cNvPr>
@@ -4157,7 +4157,7 @@
             <a:hlinkClick r:id="" action="ppaction://media"/>
             <a:extLst>
               <a:ext uri="{FF2B5EF4-FFF2-40B4-BE49-F238E27FC236}">
-                <a16:creationId xmlns:a16="http://schemas.microsoft.com/office/drawing/2014/main" id="{885F3A23-806F-EE04-25A5-E25870D96BC0}"/>
+                <a16:creationId xmlns:a16="http://schemas.microsoft.com/office/drawing/2014/main" id="{B1BAB0CA-FA8E-006D-CF6F-A5571CE7ED4D}"/>
               </a:ext>
             </a:extLst>
           </p:cNvPr>
@@ -4192,7 +4192,7 @@
     </p:spTree>
     <p:extLst>
       <p:ext uri="{BB962C8B-B14F-4D97-AF65-F5344CB8AC3E}">
-        <p14:creationId xmlns:p14="http://schemas.microsoft.com/office/powerpoint/2010/main" val="3253027388"/>
+        <p14:creationId xmlns:p14="http://schemas.microsoft.com/office/powerpoint/2010/main" val="2908435597"/>
       </p:ext>
     </p:extLst>
   </p:cSld>
@@ -4316,7 +4316,7 @@
           <p:cNvPr id="2" name="テキスト ボックス 1">
             <a:extLst>
               <a:ext uri="{FF2B5EF4-FFF2-40B4-BE49-F238E27FC236}">
-                <a16:creationId xmlns:a16="http://schemas.microsoft.com/office/drawing/2014/main" id="{9B41C398-461D-9CC2-9177-949D68075117}"/>
+                <a16:creationId xmlns:a16="http://schemas.microsoft.com/office/drawing/2014/main" id="{4BE0E9A5-7825-7785-7E14-565C60172F5C}"/>
               </a:ext>
             </a:extLst>
           </p:cNvPr>
@@ -4362,7 +4362,7 @@
           <p:cNvPr id="3" name="テキスト ボックス 2">
             <a:extLst>
               <a:ext uri="{FF2B5EF4-FFF2-40B4-BE49-F238E27FC236}">
-                <a16:creationId xmlns:a16="http://schemas.microsoft.com/office/drawing/2014/main" id="{831ED4D1-AFF6-1D3F-6AB2-6534FDBE762F}"/>
+                <a16:creationId xmlns:a16="http://schemas.microsoft.com/office/drawing/2014/main" id="{78E2530E-F6E6-7CB9-28F8-4F52557B41C3}"/>
               </a:ext>
             </a:extLst>
           </p:cNvPr>
@@ -4402,7 +4402,7 @@
           <p:cNvPr id="4" name="テキスト ボックス 3">
             <a:extLst>
               <a:ext uri="{FF2B5EF4-FFF2-40B4-BE49-F238E27FC236}">
-                <a16:creationId xmlns:a16="http://schemas.microsoft.com/office/drawing/2014/main" id="{2D5280DF-396B-FC97-3B6C-1487BBC8156C}"/>
+                <a16:creationId xmlns:a16="http://schemas.microsoft.com/office/drawing/2014/main" id="{FD7CA747-0E85-DE2C-D1B2-BC7293EBD8C7}"/>
               </a:ext>
             </a:extLst>
           </p:cNvPr>
@@ -4497,7 +4497,7 @@
           <p:cNvPr id="5" name="テキスト ボックス 4">
             <a:extLst>
               <a:ext uri="{FF2B5EF4-FFF2-40B4-BE49-F238E27FC236}">
-                <a16:creationId xmlns:a16="http://schemas.microsoft.com/office/drawing/2014/main" id="{D7D8D492-9865-C890-CEA8-0A28CCD7CA65}"/>
+                <a16:creationId xmlns:a16="http://schemas.microsoft.com/office/drawing/2014/main" id="{37C948F5-82CF-F076-0076-C6880A1BF970}"/>
               </a:ext>
             </a:extLst>
           </p:cNvPr>
@@ -4544,7 +4544,7 @@
             <a:hlinkClick r:id="" action="ppaction://media"/>
             <a:extLst>
               <a:ext uri="{FF2B5EF4-FFF2-40B4-BE49-F238E27FC236}">
-                <a16:creationId xmlns:a16="http://schemas.microsoft.com/office/drawing/2014/main" id="{521C9D05-A77F-B619-42A4-722639CCB24E}"/>
+                <a16:creationId xmlns:a16="http://schemas.microsoft.com/office/drawing/2014/main" id="{959A562D-612C-F974-836E-16C0FCF36FB4}"/>
               </a:ext>
             </a:extLst>
           </p:cNvPr>
@@ -4579,7 +4579,7 @@
     </p:spTree>
     <p:extLst>
       <p:ext uri="{BB962C8B-B14F-4D97-AF65-F5344CB8AC3E}">
-        <p14:creationId xmlns:p14="http://schemas.microsoft.com/office/powerpoint/2010/main" val="1455521533"/>
+        <p14:creationId xmlns:p14="http://schemas.microsoft.com/office/powerpoint/2010/main" val="82985623"/>
       </p:ext>
     </p:extLst>
   </p:cSld>
@@ -4703,7 +4703,7 @@
           <p:cNvPr id="2" name="テキスト ボックス 1">
             <a:extLst>
               <a:ext uri="{FF2B5EF4-FFF2-40B4-BE49-F238E27FC236}">
-                <a16:creationId xmlns:a16="http://schemas.microsoft.com/office/drawing/2014/main" id="{8E228261-7063-BE30-103A-9265F66D3437}"/>
+                <a16:creationId xmlns:a16="http://schemas.microsoft.com/office/drawing/2014/main" id="{25F1E719-F484-DBB2-84C7-A6722E69E179}"/>
               </a:ext>
             </a:extLst>
           </p:cNvPr>
@@ -4749,7 +4749,7 @@
           <p:cNvPr id="3" name="テキスト ボックス 2">
             <a:extLst>
               <a:ext uri="{FF2B5EF4-FFF2-40B4-BE49-F238E27FC236}">
-                <a16:creationId xmlns:a16="http://schemas.microsoft.com/office/drawing/2014/main" id="{95399291-BE03-E067-39B9-B414E335D0DA}"/>
+                <a16:creationId xmlns:a16="http://schemas.microsoft.com/office/drawing/2014/main" id="{C1812EC8-6736-BE22-48E4-626283534B69}"/>
               </a:ext>
             </a:extLst>
           </p:cNvPr>
@@ -4789,7 +4789,7 @@
           <p:cNvPr id="4" name="テキスト ボックス 3">
             <a:extLst>
               <a:ext uri="{FF2B5EF4-FFF2-40B4-BE49-F238E27FC236}">
-                <a16:creationId xmlns:a16="http://schemas.microsoft.com/office/drawing/2014/main" id="{E8C70E3C-426D-5BC6-D39F-06EF593ACA10}"/>
+                <a16:creationId xmlns:a16="http://schemas.microsoft.com/office/drawing/2014/main" id="{8EE9CE44-CA09-640C-5391-B03CCC124C6B}"/>
               </a:ext>
             </a:extLst>
           </p:cNvPr>
@@ -4899,7 +4899,7 @@
           <p:cNvPr id="5" name="テキスト ボックス 4">
             <a:extLst>
               <a:ext uri="{FF2B5EF4-FFF2-40B4-BE49-F238E27FC236}">
-                <a16:creationId xmlns:a16="http://schemas.microsoft.com/office/drawing/2014/main" id="{804D82AD-C92B-79D4-DEF8-C09B7A29F3DA}"/>
+                <a16:creationId xmlns:a16="http://schemas.microsoft.com/office/drawing/2014/main" id="{37CD11B5-2CE8-40ED-6CA3-C298E66BE336}"/>
               </a:ext>
             </a:extLst>
           </p:cNvPr>
@@ -4946,7 +4946,7 @@
             <a:hlinkClick r:id="" action="ppaction://media"/>
             <a:extLst>
               <a:ext uri="{FF2B5EF4-FFF2-40B4-BE49-F238E27FC236}">
-                <a16:creationId xmlns:a16="http://schemas.microsoft.com/office/drawing/2014/main" id="{7B4327BF-77EC-2E35-7B70-940F03E8DA61}"/>
+                <a16:creationId xmlns:a16="http://schemas.microsoft.com/office/drawing/2014/main" id="{686AF65D-33DE-81E9-21BC-BD32D04DE955}"/>
               </a:ext>
             </a:extLst>
           </p:cNvPr>
@@ -4981,7 +4981,7 @@
     </p:spTree>
     <p:extLst>
       <p:ext uri="{BB962C8B-B14F-4D97-AF65-F5344CB8AC3E}">
-        <p14:creationId xmlns:p14="http://schemas.microsoft.com/office/powerpoint/2010/main" val="4079428943"/>
+        <p14:creationId xmlns:p14="http://schemas.microsoft.com/office/powerpoint/2010/main" val="290151625"/>
       </p:ext>
     </p:extLst>
   </p:cSld>
@@ -5105,7 +5105,7 @@
           <p:cNvPr id="2" name="テキスト ボックス 1">
             <a:extLst>
               <a:ext uri="{FF2B5EF4-FFF2-40B4-BE49-F238E27FC236}">
-                <a16:creationId xmlns:a16="http://schemas.microsoft.com/office/drawing/2014/main" id="{42581245-5DE9-2A2A-E715-5BD80389A46D}"/>
+                <a16:creationId xmlns:a16="http://schemas.microsoft.com/office/drawing/2014/main" id="{0F2466A1-FA9D-446A-EE51-62DD49303D39}"/>
               </a:ext>
             </a:extLst>
           </p:cNvPr>
@@ -5151,7 +5151,7 @@
           <p:cNvPr id="3" name="テキスト ボックス 2">
             <a:extLst>
               <a:ext uri="{FF2B5EF4-FFF2-40B4-BE49-F238E27FC236}">
-                <a16:creationId xmlns:a16="http://schemas.microsoft.com/office/drawing/2014/main" id="{4A721D55-E2D8-D463-FDF4-61C17C1B02F8}"/>
+                <a16:creationId xmlns:a16="http://schemas.microsoft.com/office/drawing/2014/main" id="{7CEC619D-09C3-C514-B8A9-DE233591EF45}"/>
               </a:ext>
             </a:extLst>
           </p:cNvPr>
@@ -5191,7 +5191,7 @@
           <p:cNvPr id="4" name="テキスト ボックス 3">
             <a:extLst>
               <a:ext uri="{FF2B5EF4-FFF2-40B4-BE49-F238E27FC236}">
-                <a16:creationId xmlns:a16="http://schemas.microsoft.com/office/drawing/2014/main" id="{5F65E9FE-071D-1407-F26F-8A7CEDC52812}"/>
+                <a16:creationId xmlns:a16="http://schemas.microsoft.com/office/drawing/2014/main" id="{D13E7228-2F34-91E5-FC9E-C0CD113321F8}"/>
               </a:ext>
             </a:extLst>
           </p:cNvPr>
@@ -5215,20 +5215,14 @@
           <a:lstStyle/>
           <a:p>
             <a:r>
-              <a:rPr kumimoji="1" lang="en-US" altLang="ja-JP" sz="2000">
+              <a:rPr kumimoji="1" lang="ja-JP" altLang="en-US" sz="2000">
                 <a:solidFill>
                   <a:srgbClr val="333333"/>
                 </a:solidFill>
                 <a:latin typeface="Arial" panose="020B0604020202020204" pitchFamily="34" charset="0"/>
               </a:rPr>
-              <a:t>Set confirmed custom domain</a:t>
-            </a:r>
-            <a:endParaRPr kumimoji="1" lang="ja-JP" altLang="en-US" sz="2000">
-              <a:solidFill>
-                <a:srgbClr val="333333"/>
-              </a:solidFill>
-              <a:latin typeface="Arial" panose="020B0604020202020204" pitchFamily="34" charset="0"/>
-            </a:endParaRPr>
+              <a:t>直近のコミットでは、実装の見直しと継続的な改善が行われました。</a:t>
+            </a:r>
           </a:p>
         </p:txBody>
       </p:sp>
@@ -5237,7 +5231,7 @@
           <p:cNvPr id="5" name="テキスト ボックス 4">
             <a:extLst>
               <a:ext uri="{FF2B5EF4-FFF2-40B4-BE49-F238E27FC236}">
-                <a16:creationId xmlns:a16="http://schemas.microsoft.com/office/drawing/2014/main" id="{B1A41926-CF3F-294C-0B5A-64F8A720ED2F}"/>
+                <a16:creationId xmlns:a16="http://schemas.microsoft.com/office/drawing/2014/main" id="{734A70F2-54D8-C404-F5D0-2CA0D2B44F7B}"/>
               </a:ext>
             </a:extLst>
           </p:cNvPr>
@@ -5284,7 +5278,7 @@
             <a:hlinkClick r:id="" action="ppaction://media"/>
             <a:extLst>
               <a:ext uri="{FF2B5EF4-FFF2-40B4-BE49-F238E27FC236}">
-                <a16:creationId xmlns:a16="http://schemas.microsoft.com/office/drawing/2014/main" id="{49D32755-A0D8-96E3-41C2-E4B227536046}"/>
+                <a16:creationId xmlns:a16="http://schemas.microsoft.com/office/drawing/2014/main" id="{004C8DC8-9821-123D-D540-7DB952E045A9}"/>
               </a:ext>
             </a:extLst>
           </p:cNvPr>
@@ -5319,7 +5313,7 @@
     </p:spTree>
     <p:extLst>
       <p:ext uri="{BB962C8B-B14F-4D97-AF65-F5344CB8AC3E}">
-        <p14:creationId xmlns:p14="http://schemas.microsoft.com/office/powerpoint/2010/main" val="4135063400"/>
+        <p14:creationId xmlns:p14="http://schemas.microsoft.com/office/powerpoint/2010/main" val="1057466792"/>
       </p:ext>
     </p:extLst>
   </p:cSld>
@@ -5362,7 +5356,7 @@
                                   <p:childTnLst>
                                     <p:cmd type="call" cmd="playFrom(0.0)">
                                       <p:cBhvr>
-                                        <p:cTn id="6" dur="6451" fill="hold"/>
+                                        <p:cTn id="6" dur="6076" fill="hold"/>
                                         <p:tgtEl>
                                           <p:spTgt spid="6"/>
                                         </p:tgtEl>
@@ -5443,7 +5437,7 @@
           <p:cNvPr id="2" name="テキスト ボックス 1">
             <a:extLst>
               <a:ext uri="{FF2B5EF4-FFF2-40B4-BE49-F238E27FC236}">
-                <a16:creationId xmlns:a16="http://schemas.microsoft.com/office/drawing/2014/main" id="{B92AAEFA-A3B2-AE35-524B-9C604B032E13}"/>
+                <a16:creationId xmlns:a16="http://schemas.microsoft.com/office/drawing/2014/main" id="{02917434-78F5-9CE1-0B96-812EE95B2DD7}"/>
               </a:ext>
             </a:extLst>
           </p:cNvPr>
@@ -5489,7 +5483,7 @@
           <p:cNvPr id="3" name="テキスト ボックス 2">
             <a:extLst>
               <a:ext uri="{FF2B5EF4-FFF2-40B4-BE49-F238E27FC236}">
-                <a16:creationId xmlns:a16="http://schemas.microsoft.com/office/drawing/2014/main" id="{45EC5B2E-21AB-99F8-A8F6-8169966379C6}"/>
+                <a16:creationId xmlns:a16="http://schemas.microsoft.com/office/drawing/2014/main" id="{E5630096-AEC6-4FAA-E11A-D0AE435EEA94}"/>
               </a:ext>
             </a:extLst>
           </p:cNvPr>
@@ -5529,7 +5523,7 @@
           <p:cNvPr id="4" name="テキスト ボックス 3">
             <a:extLst>
               <a:ext uri="{FF2B5EF4-FFF2-40B4-BE49-F238E27FC236}">
-                <a16:creationId xmlns:a16="http://schemas.microsoft.com/office/drawing/2014/main" id="{E9EC030F-EEA6-68B5-CF6E-BB20CAB097B0}"/>
+                <a16:creationId xmlns:a16="http://schemas.microsoft.com/office/drawing/2014/main" id="{EFF2114F-49BB-02B2-565E-1D16979E202C}"/>
               </a:ext>
             </a:extLst>
           </p:cNvPr>
@@ -5594,7 +5588,7 @@
           <p:cNvPr id="5" name="テキスト ボックス 4">
             <a:extLst>
               <a:ext uri="{FF2B5EF4-FFF2-40B4-BE49-F238E27FC236}">
-                <a16:creationId xmlns:a16="http://schemas.microsoft.com/office/drawing/2014/main" id="{3081D169-ACA8-E3F0-A61C-102A747931D2}"/>
+                <a16:creationId xmlns:a16="http://schemas.microsoft.com/office/drawing/2014/main" id="{E8274CB5-F838-D058-9E07-095FD0A22583}"/>
               </a:ext>
             </a:extLst>
           </p:cNvPr>
@@ -5641,7 +5635,7 @@
             <a:hlinkClick r:id="" action="ppaction://media"/>
             <a:extLst>
               <a:ext uri="{FF2B5EF4-FFF2-40B4-BE49-F238E27FC236}">
-                <a16:creationId xmlns:a16="http://schemas.microsoft.com/office/drawing/2014/main" id="{3D58468D-0E57-9790-2978-EF8C79F23ED6}"/>
+                <a16:creationId xmlns:a16="http://schemas.microsoft.com/office/drawing/2014/main" id="{333F7122-8459-4524-D1A8-D11BC39CAAEB}"/>
               </a:ext>
             </a:extLst>
           </p:cNvPr>
@@ -5676,7 +5670,7 @@
     </p:spTree>
     <p:extLst>
       <p:ext uri="{BB962C8B-B14F-4D97-AF65-F5344CB8AC3E}">
-        <p14:creationId xmlns:p14="http://schemas.microsoft.com/office/powerpoint/2010/main" val="2010341759"/>
+        <p14:creationId xmlns:p14="http://schemas.microsoft.com/office/powerpoint/2010/main" val="2077870952"/>
       </p:ext>
     </p:extLst>
   </p:cSld>
